--- a/web/public/partners/jipange-mwangaza-partnership-deck.pptx
+++ b/web/public/partners/jipange-mwangaza-partnership-deck.pptx
@@ -1499,7 +1499,7 @@
                 <a:latin typeface="QuattrocentoSans"/>
                 <a:ea typeface="QuattrocentoSans"/>
               </a:rPr>
-              <a:t>Where does my money go? Which vehicle fits my life stage and goal? JiPange answers with 18 calculators and 6 goal planners built on Kenya's actual financial architecture. Its investment-returns and retirement tools surface government bonds — and hand the user directly to Mwangaza to act.</a:t>
+              <a:t>Where does my money go? Which vehicle fits my life stage and goal? JiPange answers with 25 calculators and 6 goal planners built on Kenya's actual financial architecture. Its investment-returns and retirement tools surface government bonds — and hand the user directly to Mwangaza to act.</a:t>
             </a:r>
             <a:endParaRPr lang="en-US" sz="1100" noProof="1"/>
           </a:p>
@@ -8626,7 +8626,7 @@
                 <a:latin typeface="QuattrocentoSans"/>
                 <a:ea typeface="QuattrocentoSans"/>
               </a:rPr>
-              <a:t>Live now — 18 calculators, 6 planners, a 90-second Pesa Picture. Free to explore today.</a:t>
+              <a:t>Live now — 25 calculators, 6 planners, a 90-second Pesa Picture. Free to explore today.</a:t>
             </a:r>
             <a:endParaRPr lang="en-US" sz="1600" noProof="1"/>
           </a:p>
@@ -8776,7 +8776,7 @@
                 <a:latin typeface="QuattrocentoSans"/>
                 <a:ea typeface="QuattrocentoSans"/>
               </a:rPr>
-              <a:t>JiPange × Mwangaza Yield — free, anonymous, built on official data. Partnership enquiries: partners@jipangefinance.org [placeholder — confirm address] · The conversation can begin now.</a:t>
+              <a:t>JiPange × Mwangaza Yield — free, anonymous, built on official data. Partnership enquiries: hello@jipangefinance.org · The conversation can begin now.</a:t>
             </a:r>
             <a:endParaRPr lang="en-US" sz="800" noProof="1"/>
           </a:p>

--- a/web/public/partners/jipange-mwangaza-partnership-deck.pptx
+++ b/web/public/partners/jipange-mwangaza-partnership-deck.pptx
@@ -1019,7 +1019,7 @@
                 <a:latin typeface="QuattrocentoSans"/>
                 <a:ea typeface="QuattrocentoSans"/>
               </a:rPr>
-              <a:t>Kenya's financial planning copilot — 25 calculators, 6 goal planners, a 90-second Pesa Picture.</a:t>
+              <a:t>Kenya's financial planning copilot — 26 calculators, 6 goal planners, a 90-second Pesa Picture.</a:t>
             </a:r>
             <a:endParaRPr lang="en-US" sz="1600" noProof="1"/>
           </a:p>
@@ -1499,7 +1499,7 @@
                 <a:latin typeface="QuattrocentoSans"/>
                 <a:ea typeface="QuattrocentoSans"/>
               </a:rPr>
-              <a:t>Where does my money go? Which vehicle fits my life stage and goal? JiPange answers with 25 calculators and 6 goal planners built on Kenya's actual financial architecture. Its investment-returns and retirement tools surface government bonds — and hand the user directly to Mwangaza to act.</a:t>
+              <a:t>Where does my money go? Which vehicle fits my life stage and goal? JiPange answers with 26 calculators and 6 goal planners built on Kenya's actual financial architecture. Its investment-returns and retirement tools surface government bonds — and hand the user directly to Mwangaza to act.</a:t>
             </a:r>
             <a:endParaRPr lang="en-US" sz="1100" noProof="1"/>
           </a:p>
@@ -6875,7 +6875,7 @@
                 <a:latin typeface="MiSans"/>
                 <a:ea typeface="MiSans"/>
               </a:rPr>
-              <a:t>JiPange: 25 calculators, 6 planners. Mwangaza: 58 bonds, 387 auction records. Both live; mobile money exceeds $300B a year — 5% of GDP.</a:t>
+              <a:t>JiPange: 26 calculators, 6 planners. Mwangaza: 58 bonds, 387 auction records. Both live; mobile money exceeds $300B a year — 5% of GDP.</a:t>
             </a:r>
             <a:endParaRPr lang="en-US" sz="1600" noProof="1"/>
           </a:p>
@@ -8626,7 +8626,7 @@
                 <a:latin typeface="QuattrocentoSans"/>
                 <a:ea typeface="QuattrocentoSans"/>
               </a:rPr>
-              <a:t>Live now — 25 calculators, 6 planners, a 90-second Pesa Picture. Free to explore today.</a:t>
+              <a:t>Live now — 26 calculators, 6 planners, a 90-second Pesa Picture. Free to explore today.</a:t>
             </a:r>
             <a:endParaRPr lang="en-US" sz="1600" noProof="1"/>
           </a:p>
@@ -9132,7 +9132,7 @@
                 <a:latin typeface="QuattrocentoSans"/>
                 <a:ea typeface="QuattrocentoSans"/>
               </a:rPr>
-              <a:t> — 25 Kenya-specific calculators, 6 goal planners, a 90-second Pesa Picture. </a:t>
+              <a:t> — 26 Kenya-specific calculators, 6 goal planners, a 90-second Pesa Picture. </a:t>
             </a:r>
             <a:r>
               <a:rPr lang="en-US" sz="1100" noProof="1" b="1">
@@ -13294,7 +13294,7 @@
                 <a:latin typeface="Oranienbaum"/>
                 <a:ea typeface="Oranienbaum"/>
               </a:rPr>
-              <a:t>25 calculators</a:t>
+              <a:t>26 calculators</a:t>
             </a:r>
             <a:endParaRPr lang="en-US" sz="1600" noProof="1"/>
           </a:p>
@@ -13598,7 +13598,7 @@
                 <a:latin typeface="Oranienbaum"/>
                 <a:ea typeface="Oranienbaum"/>
               </a:rPr>
-              <a:t>25 calculators that speak Kenya's financial language</a:t>
+              <a:t>26 calculators that speak Kenya's financial language</a:t>
             </a:r>
             <a:endParaRPr lang="en-US" sz="3100" noProof="1"/>
           </a:p>
